--- a/docs/content/wrangling/wrangling_activity.pptx
+++ b/docs/content/wrangling/wrangling_activity.pptx
@@ -18,6 +18,7 @@
     <p:sldId id="266" r:id="rId12"/>
     <p:sldId id="267" r:id="rId13"/>
     <p:sldId id="268" r:id="rId14"/>
+    <p:sldId id="269" r:id="rId15"/>
   </p:sldIdLst>
   <p:sldSz cx="9144000" cy="5143500" type="screen16x9"/>
   <p:notesSz cx="6858000" cy="9144000"/>
@@ -4364,7 +4365,7 @@
             </a:pPr>
             <a:r>
               <a:rPr/>
-              <a:t>Getting unstuck</a:t>
+              <a:t>Extension — out of class (~30–40 min)</a:t>
             </a:r>
           </a:p>
         </p:txBody>
@@ -4384,16 +4385,234 @@
           <a:bodyPr/>
           <a:lstStyle/>
           <a:p>
+            <a:pPr lvl="0" indent="0" marL="0">
+              <a:buNone/>
+            </a:pPr>
+            <a:r>
+              <a:rPr i="1"/>
+              <a:t>Turn this in with your worksheet. In class you split leaves into two groups at a fixed weight. Now you build </a:t>
+            </a:r>
+            <a:r>
+              <a:rPr b="1" i="1"/>
+              <a:t>three</a:t>
+            </a:r>
+            <a:r>
+              <a:rPr i="1"/>
+              <a:t> categories with cutoffs </a:t>
+            </a:r>
+            <a:r>
+              <a:rPr b="1" i="1"/>
+              <a:t>you</a:t>
+            </a:r>
+            <a:r>
+              <a:rPr i="1"/>
+              <a:t> pick.</a:t>
+            </a:r>
+          </a:p>
+          <a:p>
+            <a:pPr lvl="0" indent="0" marL="1270000">
+              <a:buNone/>
+            </a:pPr>
+            <a:r>
+              <a:rPr sz="2000" b="1"/>
+              <a:t>Important</a:t>
+            </a:r>
+          </a:p>
+          <a:p>
+            <a:pPr lvl="0" indent="0" marL="1270000">
+              <a:buNone/>
+            </a:pPr>
+            <a:r>
+              <a:rPr sz="2000" b="1"/>
+              <a:t>E2 and E3 must be handwritten</a:t>
+            </a:r>
+            <a:r>
+              <a:rPr sz="2000"/>
+              <a:t> on paper, photographed, and embedded (</a:t>
+            </a:r>
+            <a:r>
+              <a:rPr sz="2000">
+                <a:latin typeface="Courier"/>
+              </a:rPr>
+              <a:t>![caption](my_photo.jpg)</a:t>
+            </a:r>
+            <a:r>
+              <a:rPr sz="2000"/>
+              <a:t>). Typed answers to E2/E3 get </a:t>
+            </a:r>
+            <a:r>
+              <a:rPr sz="2000" b="1"/>
+              <a:t>at most half credit, even if correct</a:t>
+            </a:r>
+            <a:r>
+              <a:rPr sz="2000"/>
+              <a:t> — I want your own prediction and reasoning about </a:t>
+            </a:r>
+            <a:r>
+              <a:rPr sz="2000" i="1"/>
+              <a:t>your own</a:t>
+            </a:r>
+            <a:r>
+              <a:rPr sz="2000"/>
+              <a:t> counts.</a:t>
+            </a:r>
+          </a:p>
+          <a:p>
+            <a:pPr lvl="0" indent="0" marL="0">
+              <a:spcBef>
+                <a:spcPts val="3000"/>
+              </a:spcBef>
+              <a:buNone/>
+            </a:pPr>
+            <a:r>
+              <a:rPr b="1"/>
+              <a:t>E1 · Three size categories (4 pts)</a:t>
+            </a:r>
+          </a:p>
+          <a:p>
+            <a:pPr lvl="0" indent="0" marL="0">
+              <a:buNone/>
+            </a:pPr>
+            <a:r>
+              <a:rPr/>
+              <a:t>Use </a:t>
+            </a:r>
+            <a:r>
+              <a:rPr>
+                <a:latin typeface="Courier"/>
+              </a:rPr>
+              <a:t>mutate()</a:t>
+            </a:r>
+            <a:r>
+              <a:rPr/>
+              <a:t> with </a:t>
+            </a:r>
+            <a:r>
+              <a:rPr>
+                <a:latin typeface="Courier"/>
+              </a:rPr>
+              <a:t>case_when()</a:t>
+            </a:r>
+            <a:r>
+              <a:rPr/>
+              <a:t> to sort every leaf into </a:t>
+            </a:r>
+            <a:r>
+              <a:rPr>
+                <a:latin typeface="Courier"/>
+              </a:rPr>
+              <a:t>"small"</a:t>
+            </a:r>
+            <a:r>
+              <a:rPr/>
+              <a:t>, </a:t>
+            </a:r>
+            <a:r>
+              <a:rPr>
+                <a:latin typeface="Courier"/>
+              </a:rPr>
+              <a:t>"medium"</a:t>
+            </a:r>
+            <a:r>
+              <a:rPr/>
+              <a:t>, </a:t>
+            </a:r>
+            <a:r>
+              <a:rPr>
+                <a:latin typeface="Courier"/>
+              </a:rPr>
+              <a:t>"large"</a:t>
+            </a:r>
+            <a:r>
+              <a:rPr/>
+              <a:t> based on </a:t>
+            </a:r>
+            <a:r>
+              <a:rPr>
+                <a:latin typeface="Courier"/>
+              </a:rPr>
+              <a:t>weight_g</a:t>
+            </a:r>
+            <a:r>
+              <a:rPr/>
+              <a:t>. </a:t>
+            </a:r>
+            <a:r>
+              <a:rPr b="1"/>
+              <a:t>You pick the two cutoff weights</a:t>
+            </a:r>
+            <a:r>
+              <a:rPr/>
+              <a:t> — look at the data first (</a:t>
+            </a:r>
+            <a:r>
+              <a:rPr>
+                <a:latin typeface="Courier"/>
+              </a:rPr>
+              <a:t>summary(tree_df$weight_g)</a:t>
+            </a:r>
+            <a:r>
+              <a:rPr/>
+              <a:t>) so they are reasonable, not 0 and Inf.</a:t>
+            </a:r>
+          </a:p>
+          <a:p>
+            <a:pPr lvl="0" indent="0" marL="0">
+              <a:buNone/>
+            </a:pPr>
+            <a:r>
+              <a:rPr/>
+              <a:t>State your two cutoffs, then show </a:t>
+            </a:r>
+            <a:r>
+              <a:rPr>
+                <a:latin typeface="Courier"/>
+              </a:rPr>
+              <a:t>count(side, size_category)</a:t>
+            </a:r>
+            <a:r>
+              <a:rPr/>
+              <a:t> — how many leaves land in each category on each side.</a:t>
+            </a:r>
+          </a:p>
+          <a:p>
+            <a:pPr lvl="0" indent="0" marL="0">
+              <a:spcBef>
+                <a:spcPts val="3000"/>
+              </a:spcBef>
+              <a:buNone/>
+            </a:pPr>
+            <a:r>
+              <a:rPr b="1"/>
+              <a:t>E2 · Predict, then check — ✍️ by hand (3 pts)</a:t>
+            </a:r>
+          </a:p>
+          <a:p>
+            <a:pPr lvl="0" indent="0" marL="0">
+              <a:buNone/>
+            </a:pPr>
+            <a:r>
+              <a:rPr b="1"/>
+              <a:t>Before running the </a:t>
+            </a:r>
+            <a:r>
+              <a:rPr b="1">
+                <a:latin typeface="Courier"/>
+              </a:rPr>
+              <a:t>count()</a:t>
+            </a:r>
+            <a:r>
+              <a:rPr b="1"/>
+              <a:t>:</a:t>
+            </a:r>
+          </a:p>
+          <a:p>
             <a:pPr lvl="0" indent="-342900" marL="342900">
               <a:buAutoNum type="arabicPeriod"/>
             </a:pPr>
             <a:r>
-              <a:rPr b="1"/>
-              <a:t>Read the error message out loud.</a:t>
-            </a:r>
-            <a:r>
-              <a:rPr/>
-              <a:t> R usually names the line and the problem.</a:t>
+              <a:rPr/>
+              <a:t>Which size category do you expect to hold the most leaves overall, and why?</a:t>
             </a:r>
           </a:p>
           <a:p>
@@ -4401,32 +4620,59 @@
               <a:buAutoNum type="arabicPeriod"/>
             </a:pPr>
             <a:r>
+              <a:rPr/>
+              <a:t>Do you expect </a:t>
+            </a:r>
+            <a:r>
+              <a:rPr>
+                <a:latin typeface="Courier"/>
+              </a:rPr>
+              <a:t>sunny</a:t>
+            </a:r>
+            <a:r>
+              <a:rPr/>
+              <a:t> or </a:t>
+            </a:r>
+            <a:r>
+              <a:rPr>
+                <a:latin typeface="Courier"/>
+              </a:rPr>
+              <a:t>shady</a:t>
+            </a:r>
+            <a:r>
+              <a:rPr/>
+              <a:t> leaves to skew toward </a:t>
+            </a:r>
+            <a:r>
+              <a:rPr>
+                <a:latin typeface="Courier"/>
+              </a:rPr>
+              <a:t>"large"</a:t>
+            </a:r>
+            <a:r>
+              <a:rPr/>
+              <a:t>? One reason.</a:t>
+            </a:r>
+          </a:p>
+          <a:p>
+            <a:pPr lvl="0" indent="0" marL="0">
+              <a:buNone/>
+            </a:pPr>
+            <a:r>
+              <a:rPr/>
+              <a:t>Then run it and, by hand, write whether you were right and — if not — your best guess for why the data came out that way.</a:t>
+            </a:r>
+          </a:p>
+          <a:p>
+            <a:pPr lvl="0" indent="0" marL="0">
+              <a:spcBef>
+                <a:spcPts val="3000"/>
+              </a:spcBef>
+              <a:buNone/>
+            </a:pPr>
+            <a:r>
               <a:rPr b="1"/>
-              <a:t>Check the usual suspects:</a:t>
-            </a:r>
-            <a:r>
-              <a:rPr/>
-              <a:t> Did you load </a:t>
-            </a:r>
-            <a:r>
-              <a:rPr>
-                <a:latin typeface="Courier"/>
-              </a:rPr>
-              <a:t>library(readxl)</a:t>
-            </a:r>
-            <a:r>
-              <a:rPr/>
-              <a:t> and </a:t>
-            </a:r>
-            <a:r>
-              <a:rPr>
-                <a:latin typeface="Courier"/>
-              </a:rPr>
-              <a:t>library(tidyverse)</a:t>
-            </a:r>
-            <a:r>
-              <a:rPr/>
-              <a:t>?</a:t>
+              <a:t>E3 · Explain it — ✍️ by hand, with YOUR counts (3 pts)</a:t>
             </a:r>
           </a:p>
           <a:p>
@@ -4434,50 +4680,8 @@
               <a:buAutoNum type="arabicPeriod"/>
             </a:pPr>
             <a:r>
-              <a:rPr b="1"/>
-              <a:t>Spelling?</a:t>
-            </a:r>
-            <a:r>
-              <a:rPr/>
-              <a:t> R is </a:t>
-            </a:r>
-            <a:r>
-              <a:rPr b="1"/>
-              <a:t>case-sensitive</a:t>
-            </a:r>
-            <a:r>
-              <a:rPr/>
-              <a:t> — </a:t>
-            </a:r>
-            <a:r>
-              <a:rPr>
-                <a:latin typeface="Courier"/>
-              </a:rPr>
-              <a:t>"Sunny"</a:t>
-            </a:r>
-            <a:r>
-              <a:rPr/>
-              <a:t> ≠ </a:t>
-            </a:r>
-            <a:r>
-              <a:rPr>
-                <a:latin typeface="Courier"/>
-              </a:rPr>
-              <a:t>"sunny"</a:t>
-            </a:r>
-            <a:r>
-              <a:rPr/>
-              <a:t>. Check with </a:t>
-            </a:r>
-            <a:r>
-              <a:rPr>
-                <a:latin typeface="Courier"/>
-              </a:rPr>
-              <a:t>names(tree_df)</a:t>
-            </a:r>
-            <a:r>
-              <a:rPr/>
-              <a:t>.</a:t>
+              <a:rPr/>
+              <a:t>In plain language, what did your cutoff choices do to the data — why would different cutoffs have changed your counts? Use your actual numbers.</a:t>
             </a:r>
           </a:p>
           <a:p>
@@ -4485,101 +4689,32 @@
               <a:buAutoNum type="arabicPeriod"/>
             </a:pPr>
             <a:r>
-              <a:rPr b="1"/>
-              <a:t>File not found?</a:t>
-            </a:r>
-            <a:r>
-              <a:rPr/>
-              <a:t> Check with </a:t>
-            </a:r>
-            <a:r>
-              <a:rPr>
-                <a:latin typeface="Courier"/>
-              </a:rPr>
-              <a:t>getwd()</a:t>
-            </a:r>
-            <a:r>
-              <a:rPr/>
-              <a:t> and confirm the </a:t>
-            </a:r>
-            <a:r>
-              <a:rPr>
-                <a:latin typeface="Courier"/>
-              </a:rPr>
-              <a:t>data/</a:t>
-            </a:r>
-            <a:r>
-              <a:rPr/>
-              <a:t> folder is inside your project.</a:t>
-            </a:r>
-          </a:p>
-          <a:p>
-            <a:pPr lvl="0" indent="-342900" marL="342900">
-              <a:buAutoNum type="arabicPeriod"/>
-            </a:pPr>
-            <a:r>
-              <a:rPr b="1"/>
-              <a:t>Cheat sheets</a:t>
-            </a:r>
-            <a:r>
-              <a:rPr/>
-              <a:t> — </a:t>
-            </a:r>
-            <a:r>
-              <a:rPr>
-                <a:hlinkClick r:id="rId2"/>
-              </a:rPr>
-              <a:t>https://posit.co/resources/cheatsheets/</a:t>
-            </a:r>
-          </a:p>
-          <a:p>
-            <a:pPr lvl="0" indent="-342900" marL="342900">
-              <a:buAutoNum type="arabicPeriod"/>
-            </a:pPr>
-            <a:r>
-              <a:rPr b="1"/>
-              <a:t>Bring the exact error</a:t>
-            </a:r>
-            <a:r>
-              <a:rPr/>
-              <a:t> (copy-paste it) to class, Canvas, or office hours.</a:t>
-            </a:r>
-          </a:p>
-          <a:p>
-            <a:pPr lvl="0" indent="0" marL="1270000">
-              <a:buNone/>
-            </a:pPr>
-            <a:r>
-              <a:rPr sz="2000"/>
-              <a:t>💡 </a:t>
-            </a:r>
-            <a:r>
-              <a:rPr sz="2000" b="1"/>
-              <a:t>Key idea:</a:t>
-            </a:r>
-            <a:r>
-              <a:rPr sz="2000"/>
-              <a:t> an </a:t>
-            </a:r>
-            <a:r>
-              <a:rPr sz="2000">
-                <a:latin typeface="Courier"/>
-              </a:rPr>
-              <a:t>=</a:t>
-            </a:r>
-            <a:r>
-              <a:rPr sz="2000"/>
-              <a:t> where you meant </a:t>
-            </a:r>
-            <a:r>
-              <a:rPr sz="2000">
-                <a:latin typeface="Courier"/>
-              </a:rPr>
-              <a:t>==</a:t>
-            </a:r>
-            <a:r>
-              <a:rPr sz="2000"/>
-              <a:t>, a typo’d column name — these are the errors this worksheet is built around, and reading the message before you panic will solve most of them.</a:t>
+              <a:rPr>
+                <a:latin typeface="Courier"/>
+              </a:rPr>
+              <a:t>case_when()</a:t>
+            </a:r>
+            <a:r>
+              <a:rPr/>
+              <a:t> and </a:t>
+            </a:r>
+            <a:r>
+              <a:rPr>
+                <a:latin typeface="Courier"/>
+              </a:rPr>
+              <a:t>filter()</a:t>
+            </a:r>
+            <a:r>
+              <a:rPr/>
+              <a:t> can both split data into groups. In your own words, what is the actual difference in what each one </a:t>
+            </a:r>
+            <a:r>
+              <a:rPr i="1"/>
+              <a:t>does</a:t>
+            </a:r>
+            <a:r>
+              <a:rPr/>
+              <a:t> to the dataset?</a:t>
             </a:r>
           </a:p>
         </p:txBody>
@@ -4590,6 +4725,273 @@
 </file>
 
 <file path=ppt/slides/slide13.xml><?xml version="1.0" encoding="utf-8"?>
+<p:sld xmlns:a="http://schemas.openxmlformats.org/drawingml/2006/main" xmlns:r="http://schemas.openxmlformats.org/officeDocument/2006/relationships" xmlns:p="http://schemas.openxmlformats.org/presentationml/2006/main">
+  <p:cSld>
+    <p:spTree>
+      <p:nvGrpSpPr>
+        <p:cNvPr id="1" name=""/>
+        <p:cNvGrpSpPr/>
+        <p:nvPr/>
+      </p:nvGrpSpPr>
+      <p:grpSpPr>
+        <a:xfrm>
+          <a:off x="0" y="0"/>
+          <a:ext cx="0" cy="0"/>
+          <a:chOff x="0" y="0"/>
+          <a:chExt cx="0" cy="0"/>
+        </a:xfrm>
+      </p:grpSpPr>
+      <p:sp>
+        <p:nvSpPr>
+          <p:cNvPr id="2" name="Title 1"/>
+          <p:cNvSpPr>
+            <a:spLocks noGrp="1"/>
+          </p:cNvSpPr>
+          <p:nvPr>
+            <p:ph type="title"/>
+          </p:nvPr>
+        </p:nvSpPr>
+        <p:spPr>
+          <a:xfrm>
+            <a:off x="0" y="0"/>
+            <a:ext cx="9144000" cy="582780"/>
+          </a:xfrm>
+        </p:spPr>
+        <p:txBody>
+          <a:bodyPr/>
+          <a:lstStyle/>
+          <a:p>
+            <a:pPr lvl="0" indent="0" marL="0">
+              <a:buNone/>
+            </a:pPr>
+            <a:r>
+              <a:rPr/>
+              <a:t>Getting unstuck</a:t>
+            </a:r>
+          </a:p>
+        </p:txBody>
+      </p:sp>
+      <p:sp>
+        <p:nvSpPr>
+          <p:cNvPr id="3" name="Content Placeholder 2"/>
+          <p:cNvSpPr>
+            <a:spLocks noGrp="1"/>
+          </p:cNvSpPr>
+          <p:nvPr>
+            <p:ph idx="1"/>
+          </p:nvPr>
+        </p:nvSpPr>
+        <p:spPr/>
+        <p:txBody>
+          <a:bodyPr/>
+          <a:lstStyle/>
+          <a:p>
+            <a:pPr lvl="0" indent="-342900" marL="342900">
+              <a:buAutoNum type="arabicPeriod"/>
+            </a:pPr>
+            <a:r>
+              <a:rPr b="1"/>
+              <a:t>Read the error message out loud.</a:t>
+            </a:r>
+            <a:r>
+              <a:rPr/>
+              <a:t> R usually names the line and the problem.</a:t>
+            </a:r>
+          </a:p>
+          <a:p>
+            <a:pPr lvl="0" indent="-342900" marL="342900">
+              <a:buAutoNum type="arabicPeriod"/>
+            </a:pPr>
+            <a:r>
+              <a:rPr b="1"/>
+              <a:t>Check the usual suspects:</a:t>
+            </a:r>
+            <a:r>
+              <a:rPr/>
+              <a:t> Did you load </a:t>
+            </a:r>
+            <a:r>
+              <a:rPr>
+                <a:latin typeface="Courier"/>
+              </a:rPr>
+              <a:t>library(readxl)</a:t>
+            </a:r>
+            <a:r>
+              <a:rPr/>
+              <a:t> and </a:t>
+            </a:r>
+            <a:r>
+              <a:rPr>
+                <a:latin typeface="Courier"/>
+              </a:rPr>
+              <a:t>library(tidyverse)</a:t>
+            </a:r>
+            <a:r>
+              <a:rPr/>
+              <a:t>?</a:t>
+            </a:r>
+          </a:p>
+          <a:p>
+            <a:pPr lvl="0" indent="-342900" marL="342900">
+              <a:buAutoNum type="arabicPeriod"/>
+            </a:pPr>
+            <a:r>
+              <a:rPr b="1"/>
+              <a:t>Spelling?</a:t>
+            </a:r>
+            <a:r>
+              <a:rPr/>
+              <a:t> R is </a:t>
+            </a:r>
+            <a:r>
+              <a:rPr b="1"/>
+              <a:t>case-sensitive</a:t>
+            </a:r>
+            <a:r>
+              <a:rPr/>
+              <a:t> — </a:t>
+            </a:r>
+            <a:r>
+              <a:rPr>
+                <a:latin typeface="Courier"/>
+              </a:rPr>
+              <a:t>"Sunny"</a:t>
+            </a:r>
+            <a:r>
+              <a:rPr/>
+              <a:t> ≠ </a:t>
+            </a:r>
+            <a:r>
+              <a:rPr>
+                <a:latin typeface="Courier"/>
+              </a:rPr>
+              <a:t>"sunny"</a:t>
+            </a:r>
+            <a:r>
+              <a:rPr/>
+              <a:t>. Check with </a:t>
+            </a:r>
+            <a:r>
+              <a:rPr>
+                <a:latin typeface="Courier"/>
+              </a:rPr>
+              <a:t>names(tree_df)</a:t>
+            </a:r>
+            <a:r>
+              <a:rPr/>
+              <a:t>.</a:t>
+            </a:r>
+          </a:p>
+          <a:p>
+            <a:pPr lvl="0" indent="-342900" marL="342900">
+              <a:buAutoNum type="arabicPeriod"/>
+            </a:pPr>
+            <a:r>
+              <a:rPr b="1"/>
+              <a:t>File not found?</a:t>
+            </a:r>
+            <a:r>
+              <a:rPr/>
+              <a:t> Check with </a:t>
+            </a:r>
+            <a:r>
+              <a:rPr>
+                <a:latin typeface="Courier"/>
+              </a:rPr>
+              <a:t>getwd()</a:t>
+            </a:r>
+            <a:r>
+              <a:rPr/>
+              <a:t> and confirm the </a:t>
+            </a:r>
+            <a:r>
+              <a:rPr>
+                <a:latin typeface="Courier"/>
+              </a:rPr>
+              <a:t>data/</a:t>
+            </a:r>
+            <a:r>
+              <a:rPr/>
+              <a:t> folder is inside your project.</a:t>
+            </a:r>
+          </a:p>
+          <a:p>
+            <a:pPr lvl="0" indent="-342900" marL="342900">
+              <a:buAutoNum type="arabicPeriod"/>
+            </a:pPr>
+            <a:r>
+              <a:rPr b="1"/>
+              <a:t>Cheat sheets</a:t>
+            </a:r>
+            <a:r>
+              <a:rPr/>
+              <a:t> — </a:t>
+            </a:r>
+            <a:r>
+              <a:rPr>
+                <a:hlinkClick r:id="rId2"/>
+              </a:rPr>
+              <a:t>https://posit.co/resources/cheatsheets/</a:t>
+            </a:r>
+          </a:p>
+          <a:p>
+            <a:pPr lvl="0" indent="-342900" marL="342900">
+              <a:buAutoNum type="arabicPeriod"/>
+            </a:pPr>
+            <a:r>
+              <a:rPr b="1"/>
+              <a:t>Bring the exact error</a:t>
+            </a:r>
+            <a:r>
+              <a:rPr/>
+              <a:t> (copy-paste it) to class, Canvas, or office hours.</a:t>
+            </a:r>
+          </a:p>
+          <a:p>
+            <a:pPr lvl="0" indent="0" marL="1270000">
+              <a:buNone/>
+            </a:pPr>
+            <a:r>
+              <a:rPr sz="2000"/>
+              <a:t>💡 </a:t>
+            </a:r>
+            <a:r>
+              <a:rPr sz="2000" b="1"/>
+              <a:t>Key idea:</a:t>
+            </a:r>
+            <a:r>
+              <a:rPr sz="2000"/>
+              <a:t> an </a:t>
+            </a:r>
+            <a:r>
+              <a:rPr sz="2000">
+                <a:latin typeface="Courier"/>
+              </a:rPr>
+              <a:t>=</a:t>
+            </a:r>
+            <a:r>
+              <a:rPr sz="2000"/>
+              <a:t> where you meant </a:t>
+            </a:r>
+            <a:r>
+              <a:rPr sz="2000">
+                <a:latin typeface="Courier"/>
+              </a:rPr>
+              <a:t>==</a:t>
+            </a:r>
+            <a:r>
+              <a:rPr sz="2000"/>
+              <a:t>, a typo’d column name — these are the errors this worksheet is built around, and reading the message before you panic will solve most of them.</a:t>
+            </a:r>
+          </a:p>
+        </p:txBody>
+      </p:sp>
+    </p:spTree>
+  </p:cSld>
+</p:sld>
+</file>
+
+<file path=ppt/slides/slide14.xml><?xml version="1.0" encoding="utf-8"?>
 <p:sld xmlns:a="http://schemas.openxmlformats.org/drawingml/2006/main" xmlns:r="http://schemas.openxmlformats.org/officeDocument/2006/relationships" xmlns:p="http://schemas.openxmlformats.org/presentationml/2006/main">
   <p:cSld>
     <p:spTree>
@@ -4626,7 +5028,7 @@
             </a:pPr>
             <a:r>
               <a:rPr i="1"/>
-              <a:t>End of Worksheet 05. Next: Worksheet 06 will cover summary statistics — mean, median, SD, SE, </a:t>
+              <a:t>End of the Wrangling worksheet. Next: summary statistics — mean, median, SD, SE, </a:t>
             </a:r>
             <a:r>
               <a:rPr i="1">
